--- a/catalog/samples/theme_card_grid.pptx
+++ b/catalog/samples/theme_card_grid.pptx
@@ -1522,7 +1522,7 @@
           </a:p>
           <a:p>
             <a:r>
-              <a:t>  "template_sha256": "221818f8beb271d53e6600ee78b930fc234378b6a85a6f0d5d8a671dea7ce9ee"</a:t>
+              <a:t>  "template_sha256": "f6468f3648075ec5fcf3e4d3b85a54827fba7201d02115e32a15abef65ed4b89"</a:t>
             </a:r>
           </a:p>
           <a:p>
